--- a/classes/parte-0-fundamentos-y-prerrequisitos/004-montaje-del-laboratorio-virtualizacion-kali-snapshots-y-aislamiento-de-red/clase-004-presentacion.pptx
+++ b/classes/parte-0-fundamentos-y-prerrequisitos/004-montaje-del-laboratorio-virtualizacion-kali-snapshots-y-aislamiento-de-red/clase-004-presentacion.pptx
@@ -17,6 +17,9 @@
     <p:sldId id="265" r:id="rId16"/>
     <p:sldId id="266" r:id="rId17"/>
     <p:sldId id="267" r:id="rId18"/>
+    <p:sldId id="268" r:id="rId19"/>
+    <p:sldId id="269" r:id="rId20"/>
+    <p:sldId id="270" r:id="rId21"/>
   </p:sldIdLst>
   <p:sldSz cx="9144000" cy="6858000" type="screen4x3"/>
   <p:notesSz cx="6858000" cy="9144000"/>
@@ -3198,7 +3201,7 @@
                   <a:srgbClr val="0B3D2E"/>
                 </a:solidFill>
               </a:rPr>
-              <a:t>⚠️ Errores comunes</a:t>
+              <a:t>✍️ Ejercicios</a:t>
             </a:r>
           </a:p>
         </p:txBody>
@@ -3236,67 +3239,97 @@
                   <a:srgbClr val="22282E"/>
                 </a:solidFill>
               </a:rPr>
-              <a:t>•  "VT-x is not available" / VM muy lenta — Virtualización desactivada en UEFI o Hyper-V acaparando VT-x. Actívala; en Windows desactiva Hyper-V si usas VirtualBox.</a:t>
-            </a:r>
-          </a:p>
-          <a:p>
-            <a:pPr>
-              <a:spcAft>
-                <a:spcPts val="600"/>
-              </a:spcAft>
-            </a:pPr>
-            <a:r>
-              <a:rPr sz="1500">
-                <a:solidFill>
-                  <a:srgbClr val="22282E"/>
-                </a:solidFill>
-              </a:rPr>
-              <a:t>•  Las VMs no se ven entre sí — Adaptadores en redes distintas o IPs en subredes diferentes. Ponlas en el mismo internal y subred.</a:t>
-            </a:r>
-          </a:p>
-          <a:p>
-            <a:pPr>
-              <a:spcAft>
-                <a:spcPts val="600"/>
-              </a:spcAft>
-            </a:pPr>
-            <a:r>
-              <a:rPr sz="1500">
-                <a:solidFill>
-                  <a:srgbClr val="22282E"/>
-                </a:solidFill>
-              </a:rPr>
-              <a:t>•  La víctima tiene salida a Internet — Adaptador en NAT/bridged por error. Cámbialo a red interna.</a:t>
-            </a:r>
-          </a:p>
-          <a:p>
-            <a:pPr>
-              <a:spcAft>
-                <a:spcPts val="600"/>
-              </a:spcAft>
-            </a:pPr>
-            <a:r>
-              <a:rPr sz="1500">
-                <a:solidFill>
-                  <a:srgbClr val="22282E"/>
-                </a:solidFill>
-              </a:rPr>
-              <a:t>•  Snapshot enorme / disco lleno — Snapshots acumulados sin limpiar. Consolida o elimina los antiguos.</a:t>
-            </a:r>
-          </a:p>
-          <a:p>
-            <a:pPr>
-              <a:spcAft>
-                <a:spcPts val="600"/>
-              </a:spcAft>
-            </a:pPr>
-            <a:r>
-              <a:rPr sz="1500">
-                <a:solidFill>
-                  <a:srgbClr val="22282E"/>
-                </a:solidFill>
-              </a:rPr>
-              <a:t>•  ISO no arranca — Descarga corrupta. Verifica el checksum y vuelve a bajarla.</a:t>
+              <a:t>•  Explica cuándo usar NAT, bridged, host-only e internal, y por qué el laboratorio ofensivo usa internal por defecto.</a:t>
+            </a:r>
+          </a:p>
+          <a:p>
+            <a:pPr>
+              <a:spcAft>
+                <a:spcPts val="600"/>
+              </a:spcAft>
+            </a:pPr>
+            <a:r>
+              <a:rPr sz="1500">
+                <a:solidFill>
+                  <a:srgbClr val="22282E"/>
+                </a:solidFill>
+              </a:rPr>
+              <a:t>•  Documenta el proceso completo de verificación de checksum y qué harías, paso a paso, si el hash no coincide.</a:t>
+            </a:r>
+          </a:p>
+          <a:p>
+            <a:pPr>
+              <a:spcAft>
+                <a:spcPts val="600"/>
+              </a:spcAft>
+            </a:pPr>
+            <a:r>
+              <a:rPr sz="1500">
+                <a:solidFill>
+                  <a:srgbClr val="22282E"/>
+                </a:solidFill>
+              </a:rPr>
+              <a:t>•  Crea un tercer nodo (una VM Windows de evaluación) en la misma red interna y verifica que ve a Kali pero no a Internet.</a:t>
+            </a:r>
+          </a:p>
+          <a:p>
+            <a:pPr>
+              <a:spcAft>
+                <a:spcPts val="600"/>
+              </a:spcAft>
+            </a:pPr>
+            <a:r>
+              <a:rPr sz="1500">
+                <a:solidFill>
+                  <a:srgbClr val="22282E"/>
+                </a:solidFill>
+              </a:rPr>
+              <a:t>•  Diseña una convención de nombres y de IPs para tu laboratorio, con subredes distintas por escenario.</a:t>
+            </a:r>
+          </a:p>
+          <a:p>
+            <a:pPr>
+              <a:spcAft>
+                <a:spcPts val="600"/>
+              </a:spcAft>
+            </a:pPr>
+            <a:r>
+              <a:rPr sz="1500">
+                <a:solidFill>
+                  <a:srgbClr val="22282E"/>
+                </a:solidFill>
+              </a:rPr>
+              <a:t>•  Toma un snapshot con RAM y otro sin RAM sobre la misma VM y explica la diferencia práctica al restaurarlos.</a:t>
+            </a:r>
+          </a:p>
+          <a:p>
+            <a:pPr>
+              <a:spcAft>
+                <a:spcPts val="600"/>
+              </a:spcAft>
+            </a:pPr>
+            <a:r>
+              <a:rPr sz="1500">
+                <a:solidFill>
+                  <a:srgbClr val="22282E"/>
+                </a:solidFill>
+              </a:rPr>
+              <a:t>•  Escribe un checklist de "higiene" para mantener el lab: actualizaciones, plantillas base, limpieza de snapshots y control de recursos.</a:t>
+            </a:r>
+          </a:p>
+          <a:p>
+            <a:pPr>
+              <a:spcAft>
+                <a:spcPts val="600"/>
+              </a:spcAft>
+            </a:pPr>
+            <a:r>
+              <a:rPr sz="1500">
+                <a:solidFill>
+                  <a:srgbClr val="22282E"/>
+                </a:solidFill>
+              </a:rPr>
+              <a:t>•  Argumenta por qué verificar la firma, además del checksum, aporta una garantía que el checksum solo no da.</a:t>
             </a:r>
           </a:p>
         </p:txBody>
@@ -3347,7 +3380,7 @@
                   <a:srgbClr val="0B3D2E"/>
                 </a:solidFill>
               </a:rPr>
-              <a:t>❓ Preguntas frecuentes</a:t>
+              <a:t>📝 Reto verificable</a:t>
             </a:r>
           </a:p>
         </p:txBody>
@@ -3385,52 +3418,22 @@
                   <a:srgbClr val="22282E"/>
                 </a:solidFill>
               </a:rPr>
-              <a:t>•  ❓ ¿Puedo usar Kali como sistema principal? No es recomendable para empezar: Kali está pensado como herramienta, no como escritorio diario. Úsalo dentro de una VM aislada.</a:t>
-            </a:r>
-          </a:p>
-          <a:p>
-            <a:pPr>
-              <a:spcAft>
-                <a:spcPts val="600"/>
-              </a:spcAft>
-            </a:pPr>
-            <a:r>
-              <a:rPr sz="1500">
-                <a:solidFill>
-                  <a:srgbClr val="22282E"/>
-                </a:solidFill>
-              </a:rPr>
-              <a:t>•  ❓ ¿VirtualBox o VMware? Ambos sirven para el curso. VirtualBox es gratuito y multiplataforma; VMware suele rendir algo mejor. Elige uno y sé consistente.</a:t>
-            </a:r>
-          </a:p>
-          <a:p>
-            <a:pPr>
-              <a:spcAft>
-                <a:spcPts val="600"/>
-              </a:spcAft>
-            </a:pPr>
-            <a:r>
-              <a:rPr sz="1500">
-                <a:solidFill>
-                  <a:srgbClr val="22282E"/>
-                </a:solidFill>
-              </a:rPr>
-              <a:t>•  ❓ ¿Por qué red interna y no host-only? Host-only deja al host en la red; interna aísla aún más. Para prácticas ofensivas con malware, cuanto más aislado, mejor.</a:t>
-            </a:r>
-          </a:p>
-          <a:p>
-            <a:pPr>
-              <a:spcAft>
-                <a:spcPts val="600"/>
-              </a:spcAft>
-            </a:pPr>
-            <a:r>
-              <a:rPr sz="1500">
-                <a:solidFill>
-                  <a:srgbClr val="22282E"/>
-                </a:solidFill>
-              </a:rPr>
-              <a:t>•  ❓ ¿Necesito mucha RAM? Con 8 GB puedes correr Kali + una víctima. Con 16 GB trabajas cómodo con varios nodos.</a:t>
+              <a:t>•  Entrega un laboratorio funcional con al menos dos VMs (Kali más una víctima) en una red interna aislada, con IPs estáticas documentadas y un snapshot base-limpia por VM. Adjunta capturas de: (a) ping…</a:t>
+            </a:r>
+          </a:p>
+          <a:p>
+            <a:pPr>
+              <a:spcAft>
+                <a:spcPts val="600"/>
+              </a:spcAft>
+            </a:pPr>
+            <a:r>
+              <a:rPr sz="1500">
+                <a:solidFill>
+                  <a:srgbClr val="22282E"/>
+                </a:solidFill>
+              </a:rPr>
+              <a:t>•  Criterio de aceptación: Kali alcanza a la víctima por la red interna pero ninguna VM alcanza Internet, y restaurar el snapshot devuelve la VM a un estado limpio verificable. Cualquier persona con tus…</a:t>
             </a:r>
           </a:p>
         </p:txBody>
@@ -3481,7 +3484,7 @@
                   <a:srgbClr val="0B3D2E"/>
                 </a:solidFill>
               </a:rPr>
-              <a:t>🔗 Referencias</a:t>
+              <a:t>⚠️ Errores comunes</a:t>
             </a:r>
           </a:p>
         </p:txBody>
@@ -3519,6 +3522,319 @@
                   <a:srgbClr val="22282E"/>
                 </a:solidFill>
               </a:rPr>
+              <a:t>•  "VT-x is not available" o VM muy lenta — Virtualización desactivada en la UEFI o Hyper-V acaparando VT-x. Actívala; en Windows, desactiva Hyper-V si usas VirtualBox.</a:t>
+            </a:r>
+          </a:p>
+          <a:p>
+            <a:pPr>
+              <a:spcAft>
+                <a:spcPts val="600"/>
+              </a:spcAft>
+            </a:pPr>
+            <a:r>
+              <a:rPr sz="1500">
+                <a:solidFill>
+                  <a:srgbClr val="22282E"/>
+                </a:solidFill>
+              </a:rPr>
+              <a:t>•  Las VMs no se ven entre sí — Adaptadores en redes distintas o IPs en subredes diferentes. Ponlas en el mismo internal y en la misma subred.</a:t>
+            </a:r>
+          </a:p>
+          <a:p>
+            <a:pPr>
+              <a:spcAft>
+                <a:spcPts val="600"/>
+              </a:spcAft>
+            </a:pPr>
+            <a:r>
+              <a:rPr sz="1500">
+                <a:solidFill>
+                  <a:srgbClr val="22282E"/>
+                </a:solidFill>
+              </a:rPr>
+              <a:t>•  La víctima tiene salida a Internet — Adaptador en NAT o bridged por error. Cámbialo a red interna y vuelve a comprobar con ping 8.8.8.8.</a:t>
+            </a:r>
+          </a:p>
+          <a:p>
+            <a:pPr>
+              <a:spcAft>
+                <a:spcPts val="600"/>
+              </a:spcAft>
+            </a:pPr>
+            <a:r>
+              <a:rPr sz="1500">
+                <a:solidFill>
+                  <a:srgbClr val="22282E"/>
+                </a:solidFill>
+              </a:rPr>
+              <a:t>•  Snapshot enorme o disco lleno — Snapshots acumulados sin limpiar. Consolida o elimina los antiguos que ya no necesites.</a:t>
+            </a:r>
+          </a:p>
+          <a:p>
+            <a:pPr>
+              <a:spcAft>
+                <a:spcPts val="600"/>
+              </a:spcAft>
+            </a:pPr>
+            <a:r>
+              <a:rPr sz="1500">
+                <a:solidFill>
+                  <a:srgbClr val="22282E"/>
+                </a:solidFill>
+              </a:rPr>
+              <a:t>•  La ISO no arranca — Descarga corrupta. Verifica el checksum y vuelve a bajarla desde la fuente oficial.</a:t>
+            </a:r>
+          </a:p>
+          <a:p>
+            <a:pPr>
+              <a:spcAft>
+                <a:spcPts val="600"/>
+              </a:spcAft>
+            </a:pPr>
+            <a:r>
+              <a:rPr sz="1500">
+                <a:solidFill>
+                  <a:srgbClr val="22282E"/>
+                </a:solidFill>
+              </a:rPr>
+              <a:t>•  El ping interno falla pese a estar en lab-net — Firewall de la VM bloqueando ICMP o IPs en subredes distintas. Revisa el firewall y el direccionamiento.</a:t>
+            </a:r>
+          </a:p>
+        </p:txBody>
+      </p:sp>
+    </p:spTree>
+  </p:cSld>
+  <p:clrMapOvr>
+    <a:masterClrMapping/>
+  </p:clrMapOvr>
+</p:sld>
+</file>
+
+<file path=ppt/slides/slide13.xml><?xml version="1.0" encoding="utf-8"?>
+<p:sld xmlns:a="http://schemas.openxmlformats.org/drawingml/2006/main" xmlns:p="http://schemas.openxmlformats.org/presentationml/2006/main" xmlns:r="http://schemas.openxmlformats.org/officeDocument/2006/relationships">
+  <p:cSld>
+    <p:spTree>
+      <p:nvGrpSpPr>
+        <p:cNvPr id="1" name=""/>
+        <p:cNvGrpSpPr/>
+        <p:nvPr/>
+      </p:nvGrpSpPr>
+      <p:grpSpPr/>
+      <p:sp>
+        <p:nvSpPr>
+          <p:cNvPr id="2" name="TextBox 1"/>
+          <p:cNvSpPr txBox="1"/>
+          <p:nvPr/>
+        </p:nvSpPr>
+        <p:spPr>
+          <a:xfrm>
+            <a:off x="457200" y="320040"/>
+            <a:ext cx="8229600" cy="822960"/>
+          </a:xfrm>
+          <a:prstGeom prst="rect">
+            <a:avLst/>
+          </a:prstGeom>
+          <a:noFill/>
+        </p:spPr>
+        <p:txBody>
+          <a:bodyPr wrap="square">
+            <a:spAutoFit/>
+          </a:bodyPr>
+          <a:lstStyle/>
+          <a:p>
+            <a:r>
+              <a:rPr sz="2600" b="1">
+                <a:solidFill>
+                  <a:srgbClr val="0B3D2E"/>
+                </a:solidFill>
+              </a:rPr>
+              <a:t>❓ Preguntas frecuentes</a:t>
+            </a:r>
+          </a:p>
+        </p:txBody>
+      </p:sp>
+      <p:sp>
+        <p:nvSpPr>
+          <p:cNvPr id="3" name="TextBox 2"/>
+          <p:cNvSpPr txBox="1"/>
+          <p:nvPr/>
+        </p:nvSpPr>
+        <p:spPr>
+          <a:xfrm>
+            <a:off x="457200" y="1280160"/>
+            <a:ext cx="8229600" cy="4937760"/>
+          </a:xfrm>
+          <a:prstGeom prst="rect">
+            <a:avLst/>
+          </a:prstGeom>
+          <a:noFill/>
+        </p:spPr>
+        <p:txBody>
+          <a:bodyPr wrap="square">
+            <a:spAutoFit/>
+          </a:bodyPr>
+          <a:lstStyle/>
+          <a:p>
+            <a:pPr>
+              <a:spcAft>
+                <a:spcPts val="600"/>
+              </a:spcAft>
+            </a:pPr>
+            <a:r>
+              <a:rPr sz="1500">
+                <a:solidFill>
+                  <a:srgbClr val="22282E"/>
+                </a:solidFill>
+              </a:rPr>
+              <a:t>•  ❓ ¿Puedo usar Kali como sistema principal? No es recomendable para empezar: Kali está diseñado como caja de herramientas, no como escritorio diario, y correrlo como anfitrión te expone…</a:t>
+            </a:r>
+          </a:p>
+          <a:p>
+            <a:pPr>
+              <a:spcAft>
+                <a:spcPts val="600"/>
+              </a:spcAft>
+            </a:pPr>
+            <a:r>
+              <a:rPr sz="1500">
+                <a:solidFill>
+                  <a:srgbClr val="22282E"/>
+                </a:solidFill>
+              </a:rPr>
+              <a:t>•  ❓ ¿VirtualBox o VMware? Ambos sirven para el curso. VirtualBox es gratuito y multiplataforma; VMware suele rendir algo mejor. Elige uno y sé consistente para no dispersarte con dos flujos distintos.</a:t>
+            </a:r>
+          </a:p>
+          <a:p>
+            <a:pPr>
+              <a:spcAft>
+                <a:spcPts val="600"/>
+              </a:spcAft>
+            </a:pPr>
+            <a:r>
+              <a:rPr sz="1500">
+                <a:solidFill>
+                  <a:srgbClr val="22282E"/>
+                </a:solidFill>
+              </a:rPr>
+              <a:t>•  ❓ ¿Por qué red interna y no host-only? Host-only deja al anfitrión dentro de la red del lab; la red interna aísla aún más, dejando las VMs solas entre sí. Para prácticas con malware, cuanto más…</a:t>
+            </a:r>
+          </a:p>
+          <a:p>
+            <a:pPr>
+              <a:spcAft>
+                <a:spcPts val="600"/>
+              </a:spcAft>
+            </a:pPr>
+            <a:r>
+              <a:rPr sz="1500">
+                <a:solidFill>
+                  <a:srgbClr val="22282E"/>
+                </a:solidFill>
+              </a:rPr>
+              <a:t>•  ❓ ¿Necesito mucha RAM? Con 8 GB puedes correr Kali más una víctima. Con 16 GB trabajas cómodo con varios nodos simultáneos. La RAM suele ser el recurso que primero se agota al añadir máquinas.</a:t>
+            </a:r>
+          </a:p>
+          <a:p>
+            <a:pPr>
+              <a:spcAft>
+                <a:spcPts val="600"/>
+              </a:spcAft>
+            </a:pPr>
+            <a:r>
+              <a:rPr sz="1500">
+                <a:solidFill>
+                  <a:srgbClr val="22282E"/>
+                </a:solidFill>
+              </a:rPr>
+              <a:t>•  ❓ ¿Cada cuánto tomo snapshots? Uno base-limpia tras instalar y actualizar cada VM, y uno más antes de cualquier experimento arriesgado. Después, limpia los que ya no aporten para no llenar el disco…</a:t>
+            </a:r>
+          </a:p>
+        </p:txBody>
+      </p:sp>
+    </p:spTree>
+  </p:cSld>
+  <p:clrMapOvr>
+    <a:masterClrMapping/>
+  </p:clrMapOvr>
+</p:sld>
+</file>
+
+<file path=ppt/slides/slide14.xml><?xml version="1.0" encoding="utf-8"?>
+<p:sld xmlns:a="http://schemas.openxmlformats.org/drawingml/2006/main" xmlns:p="http://schemas.openxmlformats.org/presentationml/2006/main" xmlns:r="http://schemas.openxmlformats.org/officeDocument/2006/relationships">
+  <p:cSld>
+    <p:spTree>
+      <p:nvGrpSpPr>
+        <p:cNvPr id="1" name=""/>
+        <p:cNvGrpSpPr/>
+        <p:nvPr/>
+      </p:nvGrpSpPr>
+      <p:grpSpPr/>
+      <p:sp>
+        <p:nvSpPr>
+          <p:cNvPr id="2" name="TextBox 1"/>
+          <p:cNvSpPr txBox="1"/>
+          <p:nvPr/>
+        </p:nvSpPr>
+        <p:spPr>
+          <a:xfrm>
+            <a:off x="457200" y="320040"/>
+            <a:ext cx="8229600" cy="822960"/>
+          </a:xfrm>
+          <a:prstGeom prst="rect">
+            <a:avLst/>
+          </a:prstGeom>
+          <a:noFill/>
+        </p:spPr>
+        <p:txBody>
+          <a:bodyPr wrap="square">
+            <a:spAutoFit/>
+          </a:bodyPr>
+          <a:lstStyle/>
+          <a:p>
+            <a:r>
+              <a:rPr sz="2600" b="1">
+                <a:solidFill>
+                  <a:srgbClr val="0B3D2E"/>
+                </a:solidFill>
+              </a:rPr>
+              <a:t>🔗 Referencias</a:t>
+            </a:r>
+          </a:p>
+        </p:txBody>
+      </p:sp>
+      <p:sp>
+        <p:nvSpPr>
+          <p:cNvPr id="3" name="TextBox 2"/>
+          <p:cNvSpPr txBox="1"/>
+          <p:nvPr/>
+        </p:nvSpPr>
+        <p:spPr>
+          <a:xfrm>
+            <a:off x="457200" y="1280160"/>
+            <a:ext cx="8229600" cy="4937760"/>
+          </a:xfrm>
+          <a:prstGeom prst="rect">
+            <a:avLst/>
+          </a:prstGeom>
+          <a:noFill/>
+        </p:spPr>
+        <p:txBody>
+          <a:bodyPr wrap="square">
+            <a:spAutoFit/>
+          </a:bodyPr>
+          <a:lstStyle/>
+          <a:p>
+            <a:pPr>
+              <a:spcAft>
+                <a:spcPts val="600"/>
+              </a:spcAft>
+            </a:pPr>
+            <a:r>
+              <a:rPr sz="1500">
+                <a:solidFill>
+                  <a:srgbClr val="22282E"/>
+                </a:solidFill>
+              </a:rPr>
               <a:t>•  Kali Linux — Get Kali y documentación — &lt;https://www.kali.org/docs/&gt;</a:t>
             </a:r>
           </a:p>
@@ -3549,7 +3865,7 @@
                   <a:srgbClr val="22282E"/>
                 </a:solidFill>
               </a:rPr>
-              <a:t>•  Rapid7 Metasploitable — &lt;https://docs.rapid7.com/metasploit/metasploitable-2/&gt;</a:t>
+              <a:t>•  Rapid7 Metasploitable 2 — &lt;https://docs.rapid7.com/metasploit/metasploitable-2/&gt;</a:t>
             </a:r>
           </a:p>
           <a:p>
@@ -3569,6 +3885,81 @@
           </a:p>
         </p:txBody>
       </p:sp>
+    </p:spTree>
+  </p:cSld>
+  <p:clrMapOvr>
+    <a:masterClrMapping/>
+  </p:clrMapOvr>
+</p:sld>
+</file>
+
+<file path=ppt/slides/slide15.xml><?xml version="1.0" encoding="utf-8"?>
+<p:sld xmlns:a="http://schemas.openxmlformats.org/drawingml/2006/main" xmlns:p="http://schemas.openxmlformats.org/presentationml/2006/main" xmlns:r="http://schemas.openxmlformats.org/officeDocument/2006/relationships">
+  <p:cSld>
+    <p:spTree>
+      <p:nvGrpSpPr>
+        <p:cNvPr id="1" name=""/>
+        <p:cNvGrpSpPr/>
+        <p:nvPr/>
+      </p:nvGrpSpPr>
+      <p:grpSpPr/>
+      <p:sp>
+        <p:nvSpPr>
+          <p:cNvPr id="2" name="TextBox 1"/>
+          <p:cNvSpPr txBox="1"/>
+          <p:nvPr/>
+        </p:nvSpPr>
+        <p:spPr>
+          <a:xfrm>
+            <a:off x="457200" y="274320"/>
+            <a:ext cx="8229600" cy="640080"/>
+          </a:xfrm>
+          <a:prstGeom prst="rect">
+            <a:avLst/>
+          </a:prstGeom>
+          <a:noFill/>
+        </p:spPr>
+        <p:txBody>
+          <a:bodyPr wrap="square">
+            <a:spAutoFit/>
+          </a:bodyPr>
+          <a:lstStyle/>
+          <a:p>
+            <a:r>
+              <a:rPr sz="2200" b="1">
+                <a:solidFill>
+                  <a:srgbClr val="0B3D2E"/>
+                </a:solidFill>
+              </a:rPr>
+              <a:t>Diagrama de la clase</a:t>
+            </a:r>
+          </a:p>
+        </p:txBody>
+      </p:sp>
+      <p:pic>
+        <p:nvPicPr>
+          <p:cNvPr id="3" name="Picture 2" descr="d88ca5bf1b194486.png"/>
+          <p:cNvPicPr>
+            <a:picLocks noChangeAspect="1"/>
+          </p:cNvPicPr>
+          <p:nvPr/>
+        </p:nvPicPr>
+        <p:blipFill>
+          <a:blip r:embed="rId2"/>
+          <a:stretch>
+            <a:fillRect/>
+          </a:stretch>
+        </p:blipFill>
+        <p:spPr>
+          <a:xfrm>
+            <a:off x="457200" y="1667597"/>
+            <a:ext cx="8229600" cy="4162886"/>
+          </a:xfrm>
+          <a:prstGeom prst="rect">
+            <a:avLst/>
+          </a:prstGeom>
+        </p:spPr>
+      </p:pic>
     </p:spTree>
   </p:cSld>
   <p:clrMapOvr>
@@ -3653,7 +4044,7 @@
                   <a:srgbClr val="22282E"/>
                 </a:solidFill>
               </a:rPr>
-              <a:t>•  Construir un laboratorio de seguridad aislado y reversible en tu propio equipo. Al terminar tendrás una máquina atacante (Kali) y una o más máquinas víctima en una red interna sin salida a Internet ni a tu red doméstica, con snapshots para volver atrás tras cada experimento.</a:t>
+              <a:t>•  Construir un laboratorio de seguridad aislado y reversible en tu propio equipo. Practicar técnicas ofensivas requiere un entorno donde el error no tenga consecuencias fuera de él: una red que no…</a:t>
             </a:r>
           </a:p>
         </p:txBody>
@@ -3772,7 +4163,7 @@
                   <a:srgbClr val="22282E"/>
                 </a:solidFill>
               </a:rPr>
-              <a:t>•  Desplegar Kali Linux y una VM víctima desde imágenes oficiales.</a:t>
+              <a:t>•  Desplegar Kali Linux y una VM víctima desde imágenes oficiales verificadas.</a:t>
             </a:r>
           </a:p>
           <a:p>
@@ -3817,7 +4208,22 @@
                   <a:srgbClr val="22282E"/>
                 </a:solidFill>
               </a:rPr>
-              <a:t>•  Verificar el aislamiento con pruebas de conectividad.</a:t>
+              <a:t>•  Verificar el aislamiento con pruebas de conectividad objetivas.</a:t>
+            </a:r>
+          </a:p>
+          <a:p>
+            <a:pPr>
+              <a:spcAft>
+                <a:spcPts val="600"/>
+              </a:spcAft>
+            </a:pPr>
+            <a:r>
+              <a:rPr sz="1500">
+                <a:solidFill>
+                  <a:srgbClr val="22282E"/>
+                </a:solidFill>
+              </a:rPr>
+              <a:t>•  Justificar las decisiones de arquitectura del laboratorio (modo de red, recursos, higiene).</a:t>
             </a:r>
           </a:p>
         </p:txBody>
@@ -4047,7 +4453,7 @@
                   <a:srgbClr val="0B3D2E"/>
                 </a:solidFill>
               </a:rPr>
-              <a:t>📖 Definiciones y características</a:t>
+              <a:t>🧠 Explicación en profundidad</a:t>
             </a:r>
           </a:p>
         </p:txBody>
@@ -4085,82 +4491,97 @@
                   <a:srgbClr val="22282E"/>
                 </a:solidFill>
               </a:rPr>
-              <a:t>•  Hipervisor: software que ejecuta VMs. Tipo 1 (ESXi, Hyper-V) corre sobre el hardware; tipo 2 (VirtualBox, VMware Workstation) sobre un SO anfitrión. Clave: para un lab personal, tipo 2 basta.</a:t>
-            </a:r>
-          </a:p>
-          <a:p>
-            <a:pPr>
-              <a:spcAft>
-                <a:spcPts val="600"/>
-              </a:spcAft>
-            </a:pPr>
-            <a:r>
-              <a:rPr sz="1500">
-                <a:solidFill>
-                  <a:srgbClr val="22282E"/>
-                </a:solidFill>
-              </a:rPr>
-              <a:t>•  Snapshot: foto del estado completo de una VM (disco + RAM). Clave: permite volver a un punto limpio en segundos.</a:t>
-            </a:r>
-          </a:p>
-          <a:p>
-            <a:pPr>
-              <a:spcAft>
-                <a:spcPts val="600"/>
-              </a:spcAft>
-            </a:pPr>
-            <a:r>
-              <a:rPr sz="1500">
-                <a:solidFill>
-                  <a:srgbClr val="22282E"/>
-                </a:solidFill>
-              </a:rPr>
-              <a:t>•  Red host-only: red virtual entre el anfitrión y las VMs, sin salida a Internet. Clave: aislamiento parcial (el host la ve).</a:t>
-            </a:r>
-          </a:p>
-          <a:p>
-            <a:pPr>
-              <a:spcAft>
-                <a:spcPts val="600"/>
-              </a:spcAft>
-            </a:pPr>
-            <a:r>
-              <a:rPr sz="1500">
-                <a:solidFill>
-                  <a:srgbClr val="22282E"/>
-                </a:solidFill>
-              </a:rPr>
-              <a:t>•  Red interna (internal): red solo entre VMs, ni siquiera el host tiene acceso directo. Clave: el mayor aislamiento.</a:t>
-            </a:r>
-          </a:p>
-          <a:p>
-            <a:pPr>
-              <a:spcAft>
-                <a:spcPts val="600"/>
-              </a:spcAft>
-            </a:pPr>
-            <a:r>
-              <a:rPr sz="1500">
-                <a:solidFill>
-                  <a:srgbClr val="22282E"/>
-                </a:solidFill>
-              </a:rPr>
-              <a:t>•  Metasploitable: VM deliberadamente vulnerable para practicar. Clave: nunca exponerla a Internet.</a:t>
-            </a:r>
-          </a:p>
-          <a:p>
-            <a:pPr>
-              <a:spcAft>
-                <a:spcPts val="600"/>
-              </a:spcAft>
-            </a:pPr>
-            <a:r>
-              <a:rPr sz="1500">
-                <a:solidFill>
-                  <a:srgbClr val="22282E"/>
-                </a:solidFill>
-              </a:rPr>
-              <a:t>•  Checksum/firma: verificación de integridad y autenticidad de la ISO. Clave: garantiza que descargaste la imagen real.</a:t>
+              <a:t>•  Un hipervisor es el software que crea y ejecuta máquinas virtuales, entornos de cómputo completos aislados unos de otros y del anfitrión. Se distinguen dos tipos. El tipo 1 (o bare-metal: ESXi…</a:t>
+            </a:r>
+          </a:p>
+          <a:p>
+            <a:pPr>
+              <a:spcAft>
+                <a:spcPts val="600"/>
+              </a:spcAft>
+            </a:pPr>
+            <a:r>
+              <a:rPr sz="1500">
+                <a:solidFill>
+                  <a:srgbClr val="22282E"/>
+                </a:solidFill>
+              </a:rPr>
+              <a:t>•  Descargar una ISO de un sistema de seguridad e instalarla sin verificarla es una contradicción: estarías confiando ciegamente en que nadie manipuló el archivo por el camino. Por eso los proyectos…</a:t>
+            </a:r>
+          </a:p>
+          <a:p>
+            <a:pPr>
+              <a:spcAft>
+                <a:spcPts val="600"/>
+              </a:spcAft>
+            </a:pPr>
+            <a:r>
+              <a:rPr sz="1500">
+                <a:solidFill>
+                  <a:srgbClr val="22282E"/>
+                </a:solidFill>
+              </a:rPr>
+              <a:t>•  La decisión más importante del laboratorio es cómo conectas las VMs, porque de ahí depende que el entorno sea seguro. Los hipervisores ofrecen cuatro modos y cada uno tiene un nivel de aislamiento…</a:t>
+            </a:r>
+          </a:p>
+          <a:p>
+            <a:pPr>
+              <a:spcAft>
+                <a:spcPts val="600"/>
+              </a:spcAft>
+            </a:pPr>
+            <a:r>
+              <a:rPr sz="1500">
+                <a:solidFill>
+                  <a:srgbClr val="22282E"/>
+                </a:solidFill>
+              </a:rPr>
+              <a:t>•  Modo de red — Quién ve a quién</a:t>
+            </a:r>
+          </a:p>
+          <a:p>
+            <a:pPr>
+              <a:spcAft>
+                <a:spcPts val="600"/>
+              </a:spcAft>
+            </a:pPr>
+            <a:r>
+              <a:rPr sz="1500">
+                <a:solidFill>
+                  <a:srgbClr val="22282E"/>
+                </a:solidFill>
+              </a:rPr>
+              <a:t>•  NAT — La VM sale, nadie entra a ella</a:t>
+            </a:r>
+          </a:p>
+          <a:p>
+            <a:pPr>
+              <a:spcAft>
+                <a:spcPts val="600"/>
+              </a:spcAft>
+            </a:pPr>
+            <a:r>
+              <a:rPr sz="1500">
+                <a:solidFill>
+                  <a:srgbClr val="22282E"/>
+                </a:solidFill>
+              </a:rPr>
+              <a:t>•  Bridged (puente) — La VM es un equipo más de tu LAN</a:t>
+            </a:r>
+          </a:p>
+          <a:p>
+            <a:pPr>
+              <a:spcAft>
+                <a:spcPts val="600"/>
+              </a:spcAft>
+            </a:pPr>
+            <a:r>
+              <a:rPr sz="1500">
+                <a:solidFill>
+                  <a:srgbClr val="22282E"/>
+                </a:solidFill>
+              </a:rPr>
+              <a:t>•  Host-only — VM ↔ host, pero no a Internet</a:t>
             </a:r>
           </a:p>
         </p:txBody>
@@ -4211,7 +4632,7 @@
                   <a:srgbClr val="0B3D2E"/>
                 </a:solidFill>
               </a:rPr>
-              <a:t>🧰 Herramientas y preparación</a:t>
+              <a:t>📖 Definiciones y características</a:t>
             </a:r>
           </a:p>
         </p:txBody>
@@ -4249,7 +4670,97 @@
                   <a:srgbClr val="22282E"/>
                 </a:solidFill>
               </a:rPr>
-              <a:t>•  Instala VirtualBox (gratuito, multiplataforma) o VMware Workstation Player. Descarga la imagen oficial de Kali Linux desde &lt;https://www.kali.org/get-kali/&gt; y una víctima como Metasploitable 2 o DVWA. Verifica siempre el checksum SHA-256 publicado. Comprueba que la virtualización esté activada en la BIOS/UEFI.</a:t>
+              <a:t>•  Hipervisor: software que crea y ejecuta máquinas virtuales. El tipo 1 corre sobre el hardware (ESXi, Hyper-V); el tipo 2 sobre un sistema anfitrión (VirtualBox, VMware Workstation). Para un…</a:t>
+            </a:r>
+          </a:p>
+          <a:p>
+            <a:pPr>
+              <a:spcAft>
+                <a:spcPts val="600"/>
+              </a:spcAft>
+            </a:pPr>
+            <a:r>
+              <a:rPr sz="1500">
+                <a:solidFill>
+                  <a:srgbClr val="22282E"/>
+                </a:solidFill>
+              </a:rPr>
+              <a:t>•  Virtualización asistida por hardware (VT-x/AMD-V): extensiones del procesador que permiten ejecutar VMs con rendimiento aceptable. Sin ellas, la emulación por software hace las máquinas…</a:t>
+            </a:r>
+          </a:p>
+          <a:p>
+            <a:pPr>
+              <a:spcAft>
+                <a:spcPts val="600"/>
+              </a:spcAft>
+            </a:pPr>
+            <a:r>
+              <a:rPr sz="1500">
+                <a:solidFill>
+                  <a:srgbClr val="22282E"/>
+                </a:solidFill>
+              </a:rPr>
+              <a:t>•  Snapshot: fotografía del estado completo de una VM (disco y opcionalmente RAM). Permite volver a un punto limpio en segundos, lo que hace seguro experimentar con exploits o malware.</a:t>
+            </a:r>
+          </a:p>
+          <a:p>
+            <a:pPr>
+              <a:spcAft>
+                <a:spcPts val="600"/>
+              </a:spcAft>
+            </a:pPr>
+            <a:r>
+              <a:rPr sz="1500">
+                <a:solidFill>
+                  <a:srgbClr val="22282E"/>
+                </a:solidFill>
+              </a:rPr>
+              <a:t>•  Red host-only: red virtual entre el anfitrión y las VMs, sin salida a Internet. Aísla del exterior pero el host sigue formando parte de la red, útil cuando el anfitrión debe interactuar con el lab.</a:t>
+            </a:r>
+          </a:p>
+          <a:p>
+            <a:pPr>
+              <a:spcAft>
+                <a:spcPts val="600"/>
+              </a:spcAft>
+            </a:pPr>
+            <a:r>
+              <a:rPr sz="1500">
+                <a:solidFill>
+                  <a:srgbClr val="22282E"/>
+                </a:solidFill>
+              </a:rPr>
+              <a:t>•  Red interna (internal): red que conecta solo a las VMs entre sí, sin que el host ni Internet tengan acceso. Es el nivel máximo de aislamiento y la opción por defecto para prácticas ofensivas.</a:t>
+            </a:r>
+          </a:p>
+          <a:p>
+            <a:pPr>
+              <a:spcAft>
+                <a:spcPts val="600"/>
+              </a:spcAft>
+            </a:pPr>
+            <a:r>
+              <a:rPr sz="1500">
+                <a:solidFill>
+                  <a:srgbClr val="22282E"/>
+                </a:solidFill>
+              </a:rPr>
+              <a:t>•  NAT y bridged: modos con salida a Internet. NAT permite a la VM salir sin ser alcanzable desde fuera; bridged la convierte en un equipo más de tu LAN. Ambos rompen el aislamiento y se evitan en un…</a:t>
+            </a:r>
+          </a:p>
+          <a:p>
+            <a:pPr>
+              <a:spcAft>
+                <a:spcPts val="600"/>
+              </a:spcAft>
+            </a:pPr>
+            <a:r>
+              <a:rPr sz="1500">
+                <a:solidFill>
+                  <a:srgbClr val="22282E"/>
+                </a:solidFill>
+              </a:rPr>
+              <a:t>•  Checksum (SHA-256): hash criptográfico que verifica que una descarga es idéntica bit a bit a la publicada. Si no coincide, la imagen está corrupta o manipulada y no debe usarse.</a:t>
             </a:r>
           </a:p>
         </p:txBody>
@@ -4300,7 +4811,7 @@
                   <a:srgbClr val="0B3D2E"/>
                 </a:solidFill>
               </a:rPr>
-              <a:t>🧪 Laboratorio guiado</a:t>
+              <a:t>📔 Glosario</a:t>
             </a:r>
           </a:p>
         </p:txBody>
@@ -4338,97 +4849,97 @@
                   <a:srgbClr val="22282E"/>
                 </a:solidFill>
               </a:rPr>
-              <a:t>•  Comprobar virtualización. En Windows, abre el Administrador de tareas → Rendimiento → CPU y confirma "Virtualización: habilitada". Si no, actívala en la UEFI (VT-x/AMD-V).</a:t>
-            </a:r>
-          </a:p>
-          <a:p>
-            <a:pPr>
-              <a:spcAft>
-                <a:spcPts val="600"/>
-              </a:spcAft>
-            </a:pPr>
-            <a:r>
-              <a:rPr sz="1500">
-                <a:solidFill>
-                  <a:srgbClr val="22282E"/>
-                </a:solidFill>
-              </a:rPr>
-              <a:t>•  Verificar la ISO de Kali. Descarga la imagen y su checksum. En PowerShell:</a:t>
-            </a:r>
-          </a:p>
-          <a:p>
-            <a:pPr>
-              <a:spcAft>
-                <a:spcPts val="600"/>
-              </a:spcAft>
-            </a:pPr>
-            <a:r>
-              <a:rPr sz="1500">
-                <a:solidFill>
-                  <a:srgbClr val="22282E"/>
-                </a:solidFill>
-              </a:rPr>
-              <a:t>•  Get-FileHash .\kali-linux-.iso -Algorithm SHA256</a:t>
-            </a:r>
-          </a:p>
-          <a:p>
-            <a:pPr>
-              <a:spcAft>
-                <a:spcPts val="600"/>
-              </a:spcAft>
-            </a:pPr>
-            <a:r>
-              <a:rPr sz="1500">
-                <a:solidFill>
-                  <a:srgbClr val="22282E"/>
-                </a:solidFill>
-              </a:rPr>
-              <a:t>•  Compara el resultado con el valor oficial de kali.org. Si no coincide, no la uses.</a:t>
-            </a:r>
-          </a:p>
-          <a:p>
-            <a:pPr>
-              <a:spcAft>
-                <a:spcPts val="600"/>
-              </a:spcAft>
-            </a:pPr>
-            <a:r>
-              <a:rPr sz="1500">
-                <a:solidFill>
-                  <a:srgbClr val="22282E"/>
-                </a:solidFill>
-              </a:rPr>
-              <a:t>•  Crear la VM Kali en VirtualBox: 2 vCPU, 4 GB RAM, 40 GB disco. Monta la ISO y completa la instalación gráfica.</a:t>
-            </a:r>
-          </a:p>
-          <a:p>
-            <a:pPr>
-              <a:spcAft>
-                <a:spcPts val="600"/>
-              </a:spcAft>
-            </a:pPr>
-            <a:r>
-              <a:rPr sz="1500">
-                <a:solidFill>
-                  <a:srgbClr val="22282E"/>
-                </a:solidFill>
-              </a:rPr>
-              <a:t>•  Crear la red interna. En VirtualBox → Herramientas → Red, o por VM en Configuración → Red → "Red interna" con nombre lab-net. Asigna ese adaptador a Kali y a la víctima.</a:t>
-            </a:r>
-          </a:p>
-          <a:p>
-            <a:pPr>
-              <a:spcAft>
-                <a:spcPts val="600"/>
-              </a:spcAft>
-            </a:pPr>
-            <a:r>
-              <a:rPr sz="1500">
-                <a:solidFill>
-                  <a:srgbClr val="22282E"/>
-                </a:solidFill>
-              </a:rPr>
-              <a:t>•  Desplegar la víctima (Metasploitable) importando el OVA/OVF y conectándola a lab-net.</a:t>
+              <a:t>•  Término — Definición concisa</a:t>
+            </a:r>
+          </a:p>
+          <a:p>
+            <a:pPr>
+              <a:spcAft>
+                <a:spcPts val="600"/>
+              </a:spcAft>
+            </a:pPr>
+            <a:r>
+              <a:rPr sz="1500">
+                <a:solidFill>
+                  <a:srgbClr val="22282E"/>
+                </a:solidFill>
+              </a:rPr>
+              <a:t>•  Hipervisor — Software que ejecuta máquinas virtuales</a:t>
+            </a:r>
+          </a:p>
+          <a:p>
+            <a:pPr>
+              <a:spcAft>
+                <a:spcPts val="600"/>
+              </a:spcAft>
+            </a:pPr>
+            <a:r>
+              <a:rPr sz="1500">
+                <a:solidFill>
+                  <a:srgbClr val="22282E"/>
+                </a:solidFill>
+              </a:rPr>
+              <a:t>•  Tipo 1 / bare-metal — Hipervisor que corre directo sobre el hardware</a:t>
+            </a:r>
+          </a:p>
+          <a:p>
+            <a:pPr>
+              <a:spcAft>
+                <a:spcPts val="600"/>
+              </a:spcAft>
+            </a:pPr>
+            <a:r>
+              <a:rPr sz="1500">
+                <a:solidFill>
+                  <a:srgbClr val="22282E"/>
+                </a:solidFill>
+              </a:rPr>
+              <a:t>•  Tipo 2 / hosted — Hipervisor que corre sobre un sistema operativo anfitrión</a:t>
+            </a:r>
+          </a:p>
+          <a:p>
+            <a:pPr>
+              <a:spcAft>
+                <a:spcPts val="600"/>
+              </a:spcAft>
+            </a:pPr>
+            <a:r>
+              <a:rPr sz="1500">
+                <a:solidFill>
+                  <a:srgbClr val="22282E"/>
+                </a:solidFill>
+              </a:rPr>
+              <a:t>•  VT-x / AMD-V — Virtualización asistida por hardware de Intel / AMD</a:t>
+            </a:r>
+          </a:p>
+          <a:p>
+            <a:pPr>
+              <a:spcAft>
+                <a:spcPts val="600"/>
+              </a:spcAft>
+            </a:pPr>
+            <a:r>
+              <a:rPr sz="1500">
+                <a:solidFill>
+                  <a:srgbClr val="22282E"/>
+                </a:solidFill>
+              </a:rPr>
+              <a:t>•  VM — Máquina virtual: entorno de cómputo aislado</a:t>
+            </a:r>
+          </a:p>
+          <a:p>
+            <a:pPr>
+              <a:spcAft>
+                <a:spcPts val="600"/>
+              </a:spcAft>
+            </a:pPr>
+            <a:r>
+              <a:rPr sz="1500">
+                <a:solidFill>
+                  <a:srgbClr val="22282E"/>
+                </a:solidFill>
+              </a:rPr>
+              <a:t>•  Snapshot — Fotografía restaurable del estado de una VM</a:t>
             </a:r>
           </a:p>
         </p:txBody>
@@ -4479,7 +4990,7 @@
                   <a:srgbClr val="0B3D2E"/>
                 </a:solidFill>
               </a:rPr>
-              <a:t>✍️ Ejercicios</a:t>
+              <a:t>🧰 Herramientas y preparación</a:t>
             </a:r>
           </a:p>
         </p:txBody>
@@ -4517,82 +5028,7 @@
                   <a:srgbClr val="22282E"/>
                 </a:solidFill>
               </a:rPr>
-              <a:t>•  Explica cuándo usar NAT, bridged, host-only e internal, y por qué el laboratorio usa internal.</a:t>
-            </a:r>
-          </a:p>
-          <a:p>
-            <a:pPr>
-              <a:spcAft>
-                <a:spcPts val="600"/>
-              </a:spcAft>
-            </a:pPr>
-            <a:r>
-              <a:rPr sz="1500">
-                <a:solidFill>
-                  <a:srgbClr val="22282E"/>
-                </a:solidFill>
-              </a:rPr>
-              <a:t>•  Documenta el proceso de verificación de checksum y qué harías si no coincide.</a:t>
-            </a:r>
-          </a:p>
-          <a:p>
-            <a:pPr>
-              <a:spcAft>
-                <a:spcPts val="600"/>
-              </a:spcAft>
-            </a:pPr>
-            <a:r>
-              <a:rPr sz="1500">
-                <a:solidFill>
-                  <a:srgbClr val="22282E"/>
-                </a:solidFill>
-              </a:rPr>
-              <a:t>•  Crea un tercer nodo (una VM Windows de evaluación) en la misma red y verifica que ve a Kali.</a:t>
-            </a:r>
-          </a:p>
-          <a:p>
-            <a:pPr>
-              <a:spcAft>
-                <a:spcPts val="600"/>
-              </a:spcAft>
-            </a:pPr>
-            <a:r>
-              <a:rPr sz="1500">
-                <a:solidFill>
-                  <a:srgbClr val="22282E"/>
-                </a:solidFill>
-              </a:rPr>
-              <a:t>•  Diseña una convención de nombres y de IPs para tu laboratorio (subredes por escenario).</a:t>
-            </a:r>
-          </a:p>
-          <a:p>
-            <a:pPr>
-              <a:spcAft>
-                <a:spcPts val="600"/>
-              </a:spcAft>
-            </a:pPr>
-            <a:r>
-              <a:rPr sz="1500">
-                <a:solidFill>
-                  <a:srgbClr val="22282E"/>
-                </a:solidFill>
-              </a:rPr>
-              <a:t>•  Toma un snapshot con RAM y otro sin RAM; explica la diferencia práctica.</a:t>
-            </a:r>
-          </a:p>
-          <a:p>
-            <a:pPr>
-              <a:spcAft>
-                <a:spcPts val="600"/>
-              </a:spcAft>
-            </a:pPr>
-            <a:r>
-              <a:rPr sz="1500">
-                <a:solidFill>
-                  <a:srgbClr val="22282E"/>
-                </a:solidFill>
-              </a:rPr>
-              <a:t>•  Escribe un pequeño checklist de "higiene" para mantener el lab (actualizaciones, plantillas, limpieza).</a:t>
+              <a:t>•  Instala VirtualBox (gratuito y multiplataforma) o VMware Workstation Player. Descarga la imagen oficial de Kali Linux desde &lt;https://www.kali.org/get-kali/&gt; y una máquina víctima como Metasploitable…</a:t>
             </a:r>
           </a:p>
         </p:txBody>
@@ -4643,7 +5079,7 @@
                   <a:srgbClr val="0B3D2E"/>
                 </a:solidFill>
               </a:rPr>
-              <a:t>📝 Reto verificable</a:t>
+              <a:t>🧪 Laboratorio guiado</a:t>
             </a:r>
           </a:p>
         </p:txBody>
@@ -4681,22 +5117,97 @@
                   <a:srgbClr val="22282E"/>
                 </a:solidFill>
               </a:rPr>
-              <a:t>•  Entrega un laboratorio funcional con al menos dos VMs (Kali + una víctima) en red interna aislada, con IPs estáticas documentadas y un snapshot base-limpia por VM. Adjunta capturas de: (a) ping interno exitoso, (b) ping a Internet fallido, y (c) la lista de snapshots.</a:t>
-            </a:r>
-          </a:p>
-          <a:p>
-            <a:pPr>
-              <a:spcAft>
-                <a:spcPts val="600"/>
-              </a:spcAft>
-            </a:pPr>
-            <a:r>
-              <a:rPr sz="1500">
-                <a:solidFill>
-                  <a:srgbClr val="22282E"/>
-                </a:solidFill>
-              </a:rPr>
-              <a:t>•  Criterio de aceptación: Kali alcanza a la víctima por la red interna pero ninguna VM alcanza Internet, y restaurar el snapshot devuelve la VM a un estado limpio verificable. Cualquiera con tus notas puede reproducir el montaje.</a:t>
+              <a:t>•  Comprobar la virtualización. En Windows, abre el Administrador de tareas → Rendimiento → CPU y confirma "Virtualización: habilitada". Si no lo está, actívala en la UEFI (VT-x/AMD-V).</a:t>
+            </a:r>
+          </a:p>
+          <a:p>
+            <a:pPr>
+              <a:spcAft>
+                <a:spcPts val="600"/>
+              </a:spcAft>
+            </a:pPr>
+            <a:r>
+              <a:rPr sz="1500">
+                <a:solidFill>
+                  <a:srgbClr val="22282E"/>
+                </a:solidFill>
+              </a:rPr>
+              <a:t>•  Verificar la ISO de Kali. Descarga la imagen y su checksum oficial. En PowerShell:</a:t>
+            </a:r>
+          </a:p>
+          <a:p>
+            <a:pPr>
+              <a:spcAft>
+                <a:spcPts val="600"/>
+              </a:spcAft>
+            </a:pPr>
+            <a:r>
+              <a:rPr sz="1500">
+                <a:solidFill>
+                  <a:srgbClr val="22282E"/>
+                </a:solidFill>
+              </a:rPr>
+              <a:t>•  Compara el resultado con el valor publicado en kali.org. Si no coincide, no la uses y vuelve a descargarla.</a:t>
+            </a:r>
+          </a:p>
+          <a:p>
+            <a:pPr>
+              <a:spcAft>
+                <a:spcPts val="600"/>
+              </a:spcAft>
+            </a:pPr>
+            <a:r>
+              <a:rPr sz="1500">
+                <a:solidFill>
+                  <a:srgbClr val="22282E"/>
+                </a:solidFill>
+              </a:rPr>
+              <a:t>•  Crear la VM Kali en VirtualBox: 2 vCPU, 4 GB de RAM y 40 GB de disco. Monta la ISO y completa la instalación gráfica.</a:t>
+            </a:r>
+          </a:p>
+          <a:p>
+            <a:pPr>
+              <a:spcAft>
+                <a:spcPts val="600"/>
+              </a:spcAft>
+            </a:pPr>
+            <a:r>
+              <a:rPr sz="1500">
+                <a:solidFill>
+                  <a:srgbClr val="22282E"/>
+                </a:solidFill>
+              </a:rPr>
+              <a:t>•  Crear la red interna. En VirtualBox, en la configuración de cada VM → Red, selecciona "Red interna" y ponle el nombre lab-net. Asigna ese adaptador tanto a Kali como a la víctima.</a:t>
+            </a:r>
+          </a:p>
+          <a:p>
+            <a:pPr>
+              <a:spcAft>
+                <a:spcPts val="600"/>
+              </a:spcAft>
+            </a:pPr>
+            <a:r>
+              <a:rPr sz="1500">
+                <a:solidFill>
+                  <a:srgbClr val="22282E"/>
+                </a:solidFill>
+              </a:rPr>
+              <a:t>•  Desplegar la víctima (Metasploitable) importando su OVA/OVF y conectándola a lab-net.</a:t>
+            </a:r>
+          </a:p>
+          <a:p>
+            <a:pPr>
+              <a:spcAft>
+                <a:spcPts val="600"/>
+              </a:spcAft>
+            </a:pPr>
+            <a:r>
+              <a:rPr sz="1500">
+                <a:solidFill>
+                  <a:srgbClr val="22282E"/>
+                </a:solidFill>
+              </a:rPr>
+              <a:t>•  Direccionar. Configura IPs estáticas en la misma subred, por ejemplo Kali 10.10.10.5 y víctima 10.10.10.6, con máscara /24.</a:t>
             </a:r>
           </a:p>
         </p:txBody>
